--- a/report/output/Презентация_Тактика.pptx
+++ b/report/output/Презентация_Тактика.pptx
@@ -5082,8 +5082,8 @@
         </p:blipFill>
         <p:spPr>
           <a:xfrm>
-            <a:off x="3432624" y="1280160"/>
-            <a:ext cx="5326446" cy="5074920"/>
+            <a:off x="3892022" y="1280160"/>
+            <a:ext cx="4407650" cy="5074920"/>
           </a:xfrm>
           <a:prstGeom prst="rect">
             <a:avLst/>
